--- a/presentation/PRESENTATION_SOAP_CLIENTS.pptx
+++ b/presentation/PRESENTATION_SOAP_CLIENTS.pptx
@@ -3864,7 +3864,7 @@
                 <a:ea typeface="Cambria" pitchFamily="34" charset="-122"/>
                 <a:cs typeface="Cambria" pitchFamily="34" charset="-120"/>
               </a:rPr>
-              <a:t>20 / 20</a:t>
+              <a:t>18 / 18</a:t>
             </a:r>
             <a:endParaRPr lang="en-US" sz="2400" dirty="0"/>
           </a:p>
@@ -3903,7 +3903,7 @@
                 <a:ea typeface="Calibri" pitchFamily="34" charset="-122"/>
                 <a:cs typeface="Calibri" pitchFamily="34" charset="-120"/>
               </a:rPr>
-              <a:t>tests SOAP de bout en bout</a:t>
+              <a:t>tests SOAP sur pile Docker réelle</a:t>
             </a:r>
             <a:endParaRPr lang="en-US" sz="1200" dirty="0"/>
           </a:p>
@@ -4152,7 +4152,7 @@
                 <a:ea typeface="Calibri" pitchFamily="34" charset="-122"/>
                 <a:cs typeface="Calibri" pitchFamily="34" charset="-120"/>
               </a:rPr>
-              <a:t>À valider au 1er `docker compose up` : image Laravel, dépôt Mongo réel, template Zabbix.</a:t>
+              <a:t>Validé sur pile Docker réelle : image Laravel, dépôt Mongo, template Zabbix 7.0, scénario MySQL → Mongo → SOAP → MySQL.</a:t>
             </a:r>
             <a:endParaRPr lang="en-US" sz="1100" dirty="0"/>
           </a:p>
@@ -6775,7 +6775,7 @@
       </p:sp>
       <p:sp>
         <p:nvSpPr>
-          <p:cNvPr id="12" name="boite-Laravel 11"/>
+          <p:cNvPr id="12" name="boite-Laravel 12"/>
           <p:cNvSpPr/>
           <p:nvPr/>
         </p:nvSpPr>
@@ -6833,7 +6833,7 @@
                 <a:ea typeface="Cambria" pitchFamily="34" charset="-122"/>
                 <a:cs typeface="Cambria" pitchFamily="34" charset="-120"/>
               </a:rPr>
-              <a:t>Laravel 11</a:t>
+              <a:t>Laravel 12</a:t>
             </a:r>
             <a:endParaRPr lang="en-US" sz="1500" dirty="0"/>
           </a:p>
@@ -11659,7 +11659,7 @@
                 <a:ea typeface="Calibri" pitchFamily="34" charset="-122"/>
                 <a:cs typeface="Calibri" pitchFamily="34" charset="-120"/>
               </a:rPr>
-              <a:t>http://localhost:8080/soap/clients?wsdl   —   testé avec SoapClient PHP et SoapUI</a:t>
+              <a:t>http://localhost:8080/soap/clients?wsdl   —   testé sur la pile Docker (18 cas) · requêtes SoapUI fournies</a:t>
             </a:r>
             <a:endParaRPr lang="en-US" sz="1400" dirty="0"/>
           </a:p>

--- a/presentation/PRESENTATION_SOAP_CLIENTS.pptx
+++ b/presentation/PRESENTATION_SOAP_CLIENTS.pptx
@@ -187,7 +187,7 @@
                 </a:solidFill>
                 <a:latin typeface="+mn-lt"/>
               </a:rPr>
-              <a:t>20 cas de test SOAP par domaine</a:t>
+              <a:t>23 cas de test SOAP par domaine</a:t>
             </a:r>
           </a:p>
         </c:rich>
@@ -211,7 +211,7 @@
               <c:strCache>
                 <c:ptCount val="1"/>
                 <c:pt idx="0">
-                  <c:v>Cas de test</c:v>
+                  <c:v>Nombre de cas</c:v>
                 </c:pt>
               </c:strCache>
             </c:strRef>
@@ -248,32 +248,30 @@
             <c:showLeaderLines val="0"/>
           </c:dLbls>
           <c:cat>
-            <c:multiLvlStrRef>
+            <c:strRef>
               <c:f>Sheet1!$A$2:$A$7</c:f>
-              <c:multiLvlStrCache>
+              <c:strCache>
                 <c:ptCount val="6"/>
-                <c:lvl>
-                  <c:pt idx="0">
-                    <c:v>WSDL</c:v>
-                  </c:pt>
-                  <c:pt idx="1">
-                    <c:v>getClientDetails</c:v>
-                  </c:pt>
-                  <c:pt idx="2">
-                    <c:v>searchClients</c:v>
-                  </c:pt>
-                  <c:pt idx="3">
-                    <c:v>updateClient</c:v>
-                  </c:pt>
-                  <c:pt idx="4">
-                    <c:v>Enveloppe</c:v>
-                  </c:pt>
-                  <c:pt idx="5">
-                    <c:v>Panne base</c:v>
-                  </c:pt>
-                </c:lvl>
-              </c:multiLvlStrCache>
-            </c:multiLvlStrRef>
+                <c:pt idx="0">
+                  <c:v>WSDL</c:v>
+                </c:pt>
+                <c:pt idx="1">
+                  <c:v>getClientDetails</c:v>
+                </c:pt>
+                <c:pt idx="2">
+                  <c:v>searchClients</c:v>
+                </c:pt>
+                <c:pt idx="3">
+                  <c:v>updateClient</c:v>
+                </c:pt>
+                <c:pt idx="4">
+                  <c:v>Enveloppe</c:v>
+                </c:pt>
+                <c:pt idx="5">
+                  <c:v>Panne base</c:v>
+                </c:pt>
+              </c:strCache>
+            </c:strRef>
           </c:cat>
           <c:val>
             <c:numRef>
@@ -288,13 +286,13 @@
                   <c:v>3</c:v>
                 </c:pt>
                 <c:pt idx="2">
-                  <c:v>5</c:v>
+                  <c:v>7</c:v>
                 </c:pt>
                 <c:pt idx="3">
                   <c:v>8</c:v>
                 </c:pt>
                 <c:pt idx="4">
-                  <c:v>1</c:v>
+                  <c:v>2</c:v>
                 </c:pt>
                 <c:pt idx="5">
                   <c:v>2</c:v>
@@ -3674,7 +3672,7 @@
                 <a:ea typeface="Calibri" pitchFamily="34" charset="-122"/>
                 <a:cs typeface="Calibri" pitchFamily="34" charset="-120"/>
               </a:rPr>
-              <a:t>Template « SOAP Clients Service » : 12 éléments, 6 déclencheurs, 2 graphiques. Configuration automatisée par zabbix/setup_zabbix.py.</a:t>
+              <a:t>14 éléments, 8 déclencheurs, 2 graphiques. WSDL, appel SOAP et panne MongoDB testés sur Zabbix 7.0.32.</a:t>
             </a:r>
             <a:endParaRPr lang="en-US" sz="1400" dirty="0"/>
           </a:p>
@@ -3864,7 +3862,7 @@
                 <a:ea typeface="Cambria" pitchFamily="34" charset="-122"/>
                 <a:cs typeface="Cambria" pitchFamily="34" charset="-120"/>
               </a:rPr>
-              <a:t>18 / 18</a:t>
+              <a:t>23 / 23</a:t>
             </a:r>
             <a:endParaRPr lang="en-US" sz="2400" dirty="0"/>
           </a:p>
@@ -3969,7 +3967,7 @@
                 <a:ea typeface="Cambria" pitchFamily="34" charset="-122"/>
                 <a:cs typeface="Cambria" pitchFamily="34" charset="-120"/>
               </a:rPr>
-              <a:t>21 / 21</a:t>
+              <a:t>33 / 33</a:t>
             </a:r>
             <a:endParaRPr lang="en-US" sz="2400" dirty="0"/>
           </a:p>
@@ -4008,7 +4006,7 @@
                 <a:ea typeface="Calibri" pitchFamily="34" charset="-122"/>
                 <a:cs typeface="Calibri" pitchFamily="34" charset="-120"/>
               </a:rPr>
-              <a:t>tests ETL et réconciliation</a:t>
+              <a:t>tests Python ETL / réconciliation</a:t>
             </a:r>
             <a:endParaRPr lang="en-US" sz="1200" dirty="0"/>
           </a:p>
@@ -4074,7 +4072,7 @@
                 <a:ea typeface="Cambria" pitchFamily="34" charset="-122"/>
                 <a:cs typeface="Cambria" pitchFamily="34" charset="-120"/>
               </a:rPr>
-              <a:t>2 / 2</a:t>
+              <a:t>27 / 27</a:t>
             </a:r>
             <a:endParaRPr lang="en-US" sz="2400" dirty="0"/>
           </a:p>
@@ -4113,7 +4111,7 @@
                 <a:ea typeface="Calibri" pitchFamily="34" charset="-122"/>
                 <a:cs typeface="Calibri" pitchFamily="34" charset="-120"/>
               </a:rPr>
-              <a:t>DAG importés dans Airflow 2.9.3</a:t>
+              <a:t>contrôles de la chaîne complète</a:t>
             </a:r>
             <a:endParaRPr lang="en-US" sz="1200" dirty="0"/>
           </a:p>
@@ -4152,7 +4150,7 @@
                 <a:ea typeface="Calibri" pitchFamily="34" charset="-122"/>
                 <a:cs typeface="Calibri" pitchFamily="34" charset="-120"/>
               </a:rPr>
-              <a:t>Validé sur pile Docker réelle : image Laravel, dépôt Mongo, template Zabbix 7.0, scénario MySQL → Mongo → SOAP → MySQL.</a:t>
+              <a:t>Zabbix : 9 contrôles, panne MongoDB détectée puis résolue. Couverture Python : 98 %.</a:t>
             </a:r>
             <a:endParaRPr lang="en-US" sz="1100" dirty="0"/>
           </a:p>
@@ -4260,7 +4258,7 @@
                   <a:schemeClr val="tx2"/>
                 </a:solidFill>
               </a:rPr>
-              <a:t>Répartition du travail</a:t>
+              <a:t>Membres du groupe 5 SI</a:t>
             </a:r>
             <a:endParaRPr lang="en-US" sz="3000" dirty="0"/>
           </a:p>
@@ -4375,7 +4373,7 @@
                 <a:ea typeface="Calibri" pitchFamily="34" charset="-122"/>
                 <a:cs typeface="Calibri" pitchFamily="34" charset="-120"/>
               </a:rPr>
-              <a:t>Membre 1</a:t>
+              <a:t>SANKARA</a:t>
             </a:r>
             <a:endParaRPr lang="en-US" sz="1400" dirty="0"/>
           </a:p>
@@ -4414,7 +4412,7 @@
                 <a:ea typeface="Calibri" pitchFamily="34" charset="-122"/>
                 <a:cs typeface="Calibri" pitchFamily="34" charset="-120"/>
               </a:rPr>
-              <a:t>Infrastructure Docker, dépôt Git, README</a:t>
+              <a:t>Michail Alioun Juste</a:t>
             </a:r>
             <a:endParaRPr lang="en-US" sz="1300" dirty="0"/>
           </a:p>
@@ -4529,7 +4527,7 @@
                 <a:ea typeface="Calibri" pitchFamily="34" charset="-122"/>
                 <a:cs typeface="Calibri" pitchFamily="34" charset="-120"/>
               </a:rPr>
-              <a:t>Membre 2</a:t>
+              <a:t>KOANDA</a:t>
             </a:r>
             <a:endParaRPr lang="en-US" sz="1400" dirty="0"/>
           </a:p>
@@ -4568,7 +4566,7 @@
                 <a:ea typeface="Calibri" pitchFamily="34" charset="-122"/>
                 <a:cs typeface="Calibri" pitchFamily="34" charset="-120"/>
               </a:rPr>
-              <a:t>MySQL, jeu de données, DAG 1 (ETL)</a:t>
+              <a:t>GILDAS</a:t>
             </a:r>
             <a:endParaRPr lang="en-US" sz="1300" dirty="0"/>
           </a:p>
@@ -4683,7 +4681,7 @@
                 <a:ea typeface="Calibri" pitchFamily="34" charset="-122"/>
                 <a:cs typeface="Calibri" pitchFamily="34" charset="-120"/>
               </a:rPr>
-              <a:t>Membre 3</a:t>
+              <a:t>BARRY</a:t>
             </a:r>
             <a:endParaRPr lang="en-US" sz="1400" dirty="0"/>
           </a:p>
@@ -4722,7 +4720,7 @@
                 <a:ea typeface="Calibri" pitchFamily="34" charset="-122"/>
                 <a:cs typeface="Calibri" pitchFamily="34" charset="-120"/>
               </a:rPr>
-              <a:t>Service SOAP Laravel, WSDL, validation</a:t>
+              <a:t>EL NOUR</a:t>
             </a:r>
             <a:endParaRPr lang="en-US" sz="1300" dirty="0"/>
           </a:p>
@@ -4837,7 +4835,7 @@
                 <a:ea typeface="Calibri" pitchFamily="34" charset="-122"/>
                 <a:cs typeface="Calibri" pitchFamily="34" charset="-120"/>
               </a:rPr>
-              <a:t>Membre 4</a:t>
+              <a:t>CONGO</a:t>
             </a:r>
             <a:endParaRPr lang="en-US" sz="1400" dirty="0"/>
           </a:p>
@@ -4876,7 +4874,7 @@
                 <a:ea typeface="Calibri" pitchFamily="34" charset="-122"/>
                 <a:cs typeface="Calibri" pitchFamily="34" charset="-120"/>
               </a:rPr>
-              <a:t>MongoDB, DAG 2, réconciliation</a:t>
+              <a:t>Bénéré Nelson Cephas</a:t>
             </a:r>
             <a:endParaRPr lang="en-US" sz="1300" dirty="0"/>
           </a:p>
@@ -4991,7 +4989,7 @@
                 <a:ea typeface="Calibri" pitchFamily="34" charset="-122"/>
                 <a:cs typeface="Calibri" pitchFamily="34" charset="-120"/>
               </a:rPr>
-              <a:t>Membre 5</a:t>
+              <a:t>KONE</a:t>
             </a:r>
             <a:endParaRPr lang="en-US" sz="1400" dirty="0"/>
           </a:p>
@@ -5030,7 +5028,7 @@
                 <a:ea typeface="Calibri" pitchFamily="34" charset="-122"/>
                 <a:cs typeface="Calibri" pitchFamily="34" charset="-120"/>
               </a:rPr>
-              <a:t>Zabbix, tests SoapUI, documentation</a:t>
+              <a:t>Assita</a:t>
             </a:r>
             <a:endParaRPr lang="en-US" sz="1300" dirty="0"/>
           </a:p>
@@ -5069,7 +5067,7 @@
                 <a:ea typeface="Calibri" pitchFamily="34" charset="-122"/>
                 <a:cs typeface="Calibri" pitchFamily="34" charset="-120"/>
               </a:rPr>
-              <a:t>Noms et rôles à ajuster par le groupe.</a:t>
+              <a:t>IBAM · Groupe 5 SI · Exercice 7 · 2026</a:t>
             </a:r>
             <a:endParaRPr lang="en-US" sz="1100" dirty="0"/>
           </a:p>
@@ -5310,7 +5308,7 @@
                 <a:ea typeface="Calibri" pitchFamily="34" charset="-122"/>
                 <a:cs typeface="Calibri" pitchFamily="34" charset="-120"/>
               </a:rPr>
-              <a:t>Limites : fenêtre d'incohérence jusqu'à 1 h · pas d'authentification SOAP · pas de création/suppression de clients</a:t>
+              <a:t>Limites : délai lié aux DAG et aux reprises · accès local sans authentification SOAP · pas de création/suppression</a:t>
             </a:r>
             <a:endParaRPr lang="en-US" sz="1300" dirty="0"/>
           </a:p>
@@ -7339,7 +7337,7 @@
                 <a:ea typeface="Calibri" pitchFamily="34" charset="-122"/>
                 <a:cs typeface="Calibri" pitchFamily="34" charset="-120"/>
               </a:rPr>
-              <a:t>agent HTTP : /health (30 s) · /monitoring/stats (1 min)</a:t>
+              <a:t>Santé, métriques, WSDL et consultation SOAP périodique</a:t>
             </a:r>
             <a:endParaRPr lang="en-US" sz="1200" dirty="0"/>
           </a:p>
@@ -7378,7 +7376,7 @@
                 <a:ea typeface="Calibri" pitchFamily="34" charset="-122"/>
                 <a:cs typeface="Calibri" pitchFamily="34" charset="-120"/>
               </a:rPr>
-              <a:t>11 conteneurs, un seul `docker compose up -d --build`</a:t>
+              <a:t>11 services Compose · secrets générés localement · ports locaux</a:t>
             </a:r>
             <a:endParaRPr lang="en-US" sz="1400" dirty="0"/>
           </a:p>
@@ -9882,7 +9880,7 @@
                           <a:ea typeface="Calibri" pitchFamily="34" charset="-122"/>
                           <a:cs typeface="Calibri" pitchFamily="34" charset="-120"/>
                         </a:rPr>
-                        <a:t>mise à jour + version + 1</a:t>
+                        <a:t>mise à jour si la fiche reste gérée par MySQL</a:t>
                       </a:r>
                       <a:endParaRPr lang="en-US" sz="1300" dirty="0">
                         <a:latin typeface="Calibri" charset="0"/>
@@ -10146,7 +10144,7 @@
                           <a:ea typeface="Calibri" pitchFamily="34" charset="-122"/>
                           <a:cs typeface="Calibri" pitchFamily="34" charset="-120"/>
                         </a:rPr>
-                        <a:t>jamais écrasé (Mongo = référence)</a:t>
+                        <a:t>jamais écrasé, même après retour vers MySQL</a:t>
                       </a:r>
                       <a:endParaRPr lang="en-US" sz="1300" dirty="0">
                         <a:latin typeface="Calibri" charset="0"/>
@@ -10232,7 +10230,7 @@
                 <a:ea typeface="Calibri" pitchFamily="34" charset="-122"/>
                 <a:cs typeface="Calibri" pitchFamily="34" charset="-120"/>
               </a:rPr>
-              <a:t>Relancer le DAG : 0 insertion, 0 mise à jour, 201 inchangés.</a:t>
+              <a:t>Sur une base fraîche : relancer l’import ne crée aucun doublon.</a:t>
             </a:r>
             <a:endParaRPr lang="en-US" sz="1300" dirty="0"/>
           </a:p>
@@ -11651,7 +11649,7 @@
               <a:buNone/>
             </a:pPr>
             <a:r>
-              <a:rPr lang="en-US" sz="1400" dirty="0">
+              <a:rPr lang="en-US" sz="1400" b="1" dirty="0">
                 <a:solidFill>
                   <a:schemeClr val="tx2"/>
                 </a:solidFill>
@@ -11659,9 +11657,8 @@
                 <a:ea typeface="Calibri" pitchFamily="34" charset="-122"/>
                 <a:cs typeface="Calibri" pitchFamily="34" charset="-120"/>
               </a:rPr>
-              <a:t>http://localhost:8080/soap/clients?wsdl   —   testé sur la pile Docker (18 cas) · requêtes SoapUI fournies</a:t>
-            </a:r>
-            <a:endParaRPr lang="en-US" sz="1400" dirty="0"/>
+              <a:t>23 tests SOAP sur pile Docker réelle · requêtes SoapUI fournies</a:t>
+            </a:r>
           </a:p>
         </p:txBody>
       </p:sp>
@@ -13225,7 +13222,7 @@
                 <a:ea typeface="Calibri" pitchFamily="34" charset="-122"/>
                 <a:cs typeface="Calibri" pitchFamily="34" charset="-120"/>
               </a:rPr>
-              <a:t>Statut HTTP 500 pour tout Fault (SOAP 1.1) · détail typé par le WSDL · les erreurs techniques ne divulguent aucun détail interne.</a:t>
+              <a:t>Fault : HTTP 500. Détail métier typé par le WSDL ; une erreur d’enveloppe peut ne pas avoir de détail métier.</a:t>
             </a:r>
             <a:endParaRPr lang="en-US" sz="1300" dirty="0"/>
           </a:p>
@@ -13688,7 +13685,7 @@
                 <a:ea typeface="Calibri" pitchFamily="34" charset="-122"/>
                 <a:cs typeface="Calibri" pitchFamily="34" charset="-120"/>
               </a:rPr>
-              <a:t>ignore ce client</a:t>
+              <a:t>ignore les fiches SOAP</a:t>
             </a:r>
             <a:endParaRPr lang="en-US" sz="1200" dirty="0"/>
           </a:p>
@@ -13705,9 +13702,8 @@
                 <a:ea typeface="Calibri" pitchFamily="34" charset="-122"/>
                 <a:cs typeface="Calibri" pitchFamily="34" charset="-120"/>
               </a:rPr>
-              <a:t>(conflits évités)</a:t>
-            </a:r>
-            <a:endParaRPr lang="en-US" sz="1200" dirty="0"/>
+              <a:t>même après réconciliation</a:t>
+            </a:r>
           </a:p>
         </p:txBody>
       </p:sp>

--- a/presentation/PRESENTATION_SOAP_CLIENTS.pptx
+++ b/presentation/PRESENTATION_SOAP_CLIENTS.pptx
@@ -4292,6 +4292,10 @@
             <a:prstDash val="solid"/>
           </a:ln>
         </p:spPr>
+        <p:txBody>
+          <a:bodyPr/>
+          <a:p/>
+        </p:txBody>
       </p:sp>
       <p:sp>
         <p:nvSpPr>
@@ -4317,6 +4321,10 @@
             <a:prstDash val="solid"/>
           </a:ln>
         </p:spPr>
+        <p:txBody>
+          <a:bodyPr/>
+          <a:p/>
+        </p:txBody>
       </p:sp>
       <p:pic>
         <p:nvPicPr>
@@ -4375,7 +4383,7 @@
                 <a:ea typeface="Calibri" pitchFamily="34" charset="-122"/>
                 <a:cs typeface="Calibri" pitchFamily="34" charset="-120"/>
               </a:rPr>
-              <a:t>Membre 1</a:t>
+              <a:t>Gildas KOANDA</a:t>
             </a:r>
             <a:endParaRPr lang="en-US" sz="1400" dirty="0"/>
           </a:p>
@@ -4446,6 +4454,10 @@
             <a:prstDash val="solid"/>
           </a:ln>
         </p:spPr>
+        <p:txBody>
+          <a:bodyPr/>
+          <a:p/>
+        </p:txBody>
       </p:sp>
       <p:sp>
         <p:nvSpPr>
@@ -4471,6 +4483,10 @@
             <a:prstDash val="solid"/>
           </a:ln>
         </p:spPr>
+        <p:txBody>
+          <a:bodyPr/>
+          <a:p/>
+        </p:txBody>
       </p:sp>
       <p:pic>
         <p:nvPicPr>
@@ -4529,7 +4545,7 @@
                 <a:ea typeface="Calibri" pitchFamily="34" charset="-122"/>
                 <a:cs typeface="Calibri" pitchFamily="34" charset="-120"/>
               </a:rPr>
-              <a:t>Membre 2</a:t>
+              <a:t>Michail SANKARA</a:t>
             </a:r>
             <a:endParaRPr lang="en-US" sz="1400" dirty="0"/>
           </a:p>
@@ -4600,6 +4616,10 @@
             <a:prstDash val="solid"/>
           </a:ln>
         </p:spPr>
+        <p:txBody>
+          <a:bodyPr/>
+          <a:p/>
+        </p:txBody>
       </p:sp>
       <p:sp>
         <p:nvSpPr>
@@ -4625,6 +4645,10 @@
             <a:prstDash val="solid"/>
           </a:ln>
         </p:spPr>
+        <p:txBody>
+          <a:bodyPr/>
+          <a:p/>
+        </p:txBody>
       </p:sp>
       <p:pic>
         <p:nvPicPr>
@@ -4683,7 +4707,7 @@
                 <a:ea typeface="Calibri" pitchFamily="34" charset="-122"/>
                 <a:cs typeface="Calibri" pitchFamily="34" charset="-120"/>
               </a:rPr>
-              <a:t>Membre 3</a:t>
+              <a:t>El Nour BARRY</a:t>
             </a:r>
             <a:endParaRPr lang="en-US" sz="1400" dirty="0"/>
           </a:p>
@@ -4754,6 +4778,10 @@
             <a:prstDash val="solid"/>
           </a:ln>
         </p:spPr>
+        <p:txBody>
+          <a:bodyPr/>
+          <a:p/>
+        </p:txBody>
       </p:sp>
       <p:sp>
         <p:nvSpPr>
@@ -4779,6 +4807,10 @@
             <a:prstDash val="solid"/>
           </a:ln>
         </p:spPr>
+        <p:txBody>
+          <a:bodyPr/>
+          <a:p/>
+        </p:txBody>
       </p:sp>
       <p:pic>
         <p:nvPicPr>
@@ -4837,7 +4869,7 @@
                 <a:ea typeface="Calibri" pitchFamily="34" charset="-122"/>
                 <a:cs typeface="Calibri" pitchFamily="34" charset="-120"/>
               </a:rPr>
-              <a:t>Membre 4</a:t>
+              <a:t>Cephas CONGO</a:t>
             </a:r>
             <a:endParaRPr lang="en-US" sz="1400" dirty="0"/>
           </a:p>
@@ -4908,6 +4940,10 @@
             <a:prstDash val="solid"/>
           </a:ln>
         </p:spPr>
+        <p:txBody>
+          <a:bodyPr/>
+          <a:p/>
+        </p:txBody>
       </p:sp>
       <p:sp>
         <p:nvSpPr>
@@ -4933,6 +4969,10 @@
             <a:prstDash val="solid"/>
           </a:ln>
         </p:spPr>
+        <p:txBody>
+          <a:bodyPr/>
+          <a:p/>
+        </p:txBody>
       </p:sp>
       <p:pic>
         <p:nvPicPr>
@@ -4991,7 +5031,7 @@
                 <a:ea typeface="Calibri" pitchFamily="34" charset="-122"/>
                 <a:cs typeface="Calibri" pitchFamily="34" charset="-120"/>
               </a:rPr>
-              <a:t>Membre 5</a:t>
+              <a:t>Assita KONE</a:t>
             </a:r>
             <a:endParaRPr lang="en-US" sz="1400" dirty="0"/>
           </a:p>
@@ -5069,7 +5109,7 @@
                 <a:ea typeface="Calibri" pitchFamily="34" charset="-122"/>
                 <a:cs typeface="Calibri" pitchFamily="34" charset="-120"/>
               </a:rPr>
-              <a:t>Noms et rôles à ajuster par le groupe.</a:t>
+              <a:t>Groupe 5 — Sécurité informatique (SI)</a:t>
             </a:r>
             <a:endParaRPr lang="en-US" sz="1100" dirty="0"/>
           </a:p>
